--- a/apps/resources/bundled_files/2-klass-ubakyt-oyun-1234.pptx
+++ b/apps/resources/bundled_files/2-klass-ubakyt-oyun-1234.pptx
@@ -3781,7 +3781,7 @@
                 </a:solidFill>
                 <a:latin typeface="PT Sans"/>
               </a:rPr>
-              <a:t>2-класс ›</a:t>
+              <a:t/>
             </a:r>
           </a:p>
           <a:p>
@@ -4689,7 +4689,7 @@
                 </a:solidFill>
                 <a:latin typeface="PT Sans"/>
               </a:rPr>
-              <a:t>2-класс ›</a:t>
+              <a:t/>
             </a:r>
           </a:p>
           <a:p>
@@ -16359,7 +16359,7 @@
                 </a:solidFill>
                 <a:latin typeface="PT Sans"/>
               </a:rPr>
-              <a:t>2-класс ›</a:t>
+              <a:t/>
             </a:r>
           </a:p>
           <a:p>
@@ -28257,7 +28257,7 @@
                 </a:solidFill>
                 <a:latin typeface="PT Sans"/>
               </a:rPr>
-              <a:t>2-класс ›</a:t>
+              <a:t/>
             </a:r>
           </a:p>
           <a:p>
@@ -39927,7 +39927,7 @@
                 </a:solidFill>
                 <a:latin typeface="PT Sans"/>
               </a:rPr>
-              <a:t>2-класс ›</a:t>
+              <a:t/>
             </a:r>
           </a:p>
           <a:p>
@@ -51825,7 +51825,7 @@
                 </a:solidFill>
                 <a:latin typeface="PT Sans"/>
               </a:rPr>
-              <a:t>2-класс ›</a:t>
+              <a:t/>
             </a:r>
           </a:p>
           <a:p>
@@ -52767,7 +52767,7 @@
                 </a:solidFill>
                 <a:latin typeface="PT Sans"/>
               </a:rPr>
-              <a:t>2-класс ›</a:t>
+              <a:t/>
             </a:r>
           </a:p>
           <a:p>
@@ -53937,7 +53937,7 @@
                 </a:solidFill>
                 <a:latin typeface="PT Sans"/>
               </a:rPr>
-              <a:t>2-класс ›</a:t>
+              <a:t/>
             </a:r>
           </a:p>
           <a:p>
@@ -54879,7 +54879,7 @@
                 </a:solidFill>
                 <a:latin typeface="PT Sans"/>
               </a:rPr>
-              <a:t>2-класс ›</a:t>
+              <a:t/>
             </a:r>
           </a:p>
           <a:p>
